--- a/antigravity_report_export_pakke/Bystyret_M10_Okonomi_Rapport.pptx
+++ b/antigravity_report_export_pakke/Bystyret_M10_Okonomi_Rapport.pptx
@@ -7,6 +7,8 @@
   <p:sldIdLst>
     <p:sldId id="256" r:id="rId7"/>
     <p:sldId id="257" r:id="rId8"/>
+    <p:sldId id="258" r:id="rId9"/>
+    <p:sldId id="259" r:id="rId10"/>
   </p:sldIdLst>
   <p:sldSz cx="12191695" cy="6858000" type="screen4x3"/>
   <p:notesSz cx="6858000" cy="9144000"/>
@@ -3097,8 +3099,8 @@
         </p:nvSpPr>
         <p:spPr>
           <a:xfrm>
-            <a:off x="914400" y="1828800"/>
-            <a:ext cx="10362895" cy="2743200"/>
+            <a:off x="914400" y="1645920"/>
+            <a:ext cx="10362895" cy="3657600"/>
           </a:xfrm>
           <a:prstGeom prst="rect">
             <a:avLst/>
@@ -3112,7 +3114,7 @@
           <a:lstStyle/>
           <a:p>
             <a:pPr>
-              <a:defRPr sz="3800" b="1">
+              <a:defRPr sz="3600" b="1">
                 <a:solidFill>
                   <a:srgbClr val="002855"/>
                 </a:solidFill>
@@ -3125,7 +3127,7 @@
           <a:p>
             <a:pPr>
               <a:spcBef>
-                <a:spcPts val="1000"/>
+                <a:spcPts val="1200"/>
               </a:spcBef>
               <a:defRPr sz="2000">
                 <a:solidFill>
@@ -3140,7 +3142,7 @@
           <a:p>
             <a:pPr>
               <a:spcBef>
-                <a:spcPts val="3000"/>
+                <a:spcPts val="2400"/>
               </a:spcBef>
               <a:defRPr sz="1200">
                 <a:solidFill>
@@ -3149,7 +3151,22 @@
               </a:defRPr>
             </a:pPr>
             <a:r>
-              <a:t>Generert av Antigravity Control Hub: 2026-10-17 | SHA-256 Audit: 378BFA82B8E71A1D</a:t>
+              <a:t>Generert av Antigravity Control Hub: 2026-10-18 17:08 | Saksbehandler: Frank Ellingsen, Senior Financial Controller</a:t>
+            </a:r>
+          </a:p>
+          <a:p>
+            <a:pPr>
+              <a:spcBef>
+                <a:spcPts val="800"/>
+              </a:spcBef>
+              <a:defRPr sz="1000">
+                <a:solidFill>
+                  <a:srgbClr val="94A3B8"/>
+                </a:solidFill>
+              </a:defRPr>
+            </a:pPr>
+            <a:r>
+              <a:t>Kryptografisk revisjonsforsegling: SHA-256 06B3A22A57B291904334D066AC94185D583964886D41F30A343A3E9AE23F8B3A</a:t>
             </a:r>
           </a:p>
         </p:txBody>
@@ -3195,14 +3212,14 @@
           <a:lstStyle/>
           <a:p>
             <a:pPr>
-              <a:defRPr sz="2800" b="1">
+              <a:defRPr sz="2600" b="1">
                 <a:solidFill>
                   <a:srgbClr val="002855"/>
                 </a:solidFill>
               </a:defRPr>
             </a:pPr>
             <a:r>
-              <a:t>🏛️ Top 3 Finansielle KPIs — Kristiansand kommune</a:t>
+              <a:t>🏛️ Top 3 Finansielle Nøkkeltall — Kristiansand kommune</a:t>
             </a:r>
           </a:p>
         </p:txBody>
@@ -3215,8 +3232,8 @@
         </p:nvSpPr>
         <p:spPr>
           <a:xfrm>
-            <a:off x="731520" y="1645920"/>
-            <a:ext cx="3291840" cy="4389120"/>
+            <a:off x="731520" y="1463040"/>
+            <a:ext cx="3291840" cy="4572000"/>
           </a:xfrm>
           <a:prstGeom prst="rect">
             <a:avLst/>
@@ -3277,31 +3294,31 @@
           <a:p>
             <a:pPr algn="ctr">
               <a:spcBef>
-                <a:spcPts val="1000"/>
+                <a:spcPts val="1200"/>
               </a:spcBef>
-              <a:defRPr sz="1400">
+              <a:defRPr sz="1300">
                 <a:solidFill>
                   <a:srgbClr val="475569"/>
                 </a:solidFill>
               </a:defRPr>
             </a:pPr>
             <a:r>
-              <a:t>Mål: ≥ 1,00%</a:t>
+              <a:t>Mål: ≥ 1,00% (TBU: ≥ 1,75%)</a:t>
             </a:r>
           </a:p>
           <a:p>
             <a:pPr algn="ctr">
               <a:spcBef>
-                <a:spcPts val="1500"/>
+                <a:spcPts val="1800"/>
               </a:spcBef>
-              <a:defRPr sz="1200">
+              <a:defRPr sz="1200" b="1">
                 <a:solidFill>
                   <a:srgbClr val="002855"/>
                 </a:solidFill>
               </a:defRPr>
             </a:pPr>
             <a:r>
-              <a:t>Status: Mål oppfylt</a:t>
+              <a:t>Status: 🟢 Mål oppfylt (115 mill. kr)</a:t>
             </a:r>
           </a:p>
         </p:txBody>
@@ -3314,8 +3331,8 @@
         </p:nvSpPr>
         <p:spPr>
           <a:xfrm>
-            <a:off x="4389120" y="1645920"/>
-            <a:ext cx="3291840" cy="4389120"/>
+            <a:off x="4389120" y="1463040"/>
+            <a:ext cx="3291840" cy="4572000"/>
           </a:xfrm>
           <a:prstGeom prst="rect">
             <a:avLst/>
@@ -3376,31 +3393,31 @@
           <a:p>
             <a:pPr algn="ctr">
               <a:spcBef>
-                <a:spcPts val="1000"/>
+                <a:spcPts val="1200"/>
               </a:spcBef>
-              <a:defRPr sz="1400">
+              <a:defRPr sz="1300">
                 <a:solidFill>
                   <a:srgbClr val="475569"/>
                 </a:solidFill>
               </a:defRPr>
             </a:pPr>
             <a:r>
-              <a:t>Mål: ≥ 4,00%</a:t>
+              <a:t>Mål: ≥ 4,00% (TBU: ≥ 5,00%)</a:t>
             </a:r>
           </a:p>
           <a:p>
             <a:pPr algn="ctr">
               <a:spcBef>
-                <a:spcPts val="1500"/>
+                <a:spcPts val="1800"/>
               </a:spcBef>
-              <a:defRPr sz="1200">
+              <a:defRPr sz="1200" b="1">
                 <a:solidFill>
                   <a:srgbClr val="002855"/>
                 </a:solidFill>
               </a:defRPr>
             </a:pPr>
             <a:r>
-              <a:t>Buffer: 460 mill. kr</a:t>
+              <a:t>Buffer: 🟢 460 mill. kr i reserve</a:t>
             </a:r>
           </a:p>
         </p:txBody>
@@ -3413,8 +3430,8 @@
         </p:nvSpPr>
         <p:spPr>
           <a:xfrm>
-            <a:off x="8046720" y="1645920"/>
-            <a:ext cx="3291840" cy="4389120"/>
+            <a:off x="8046720" y="1463040"/>
+            <a:ext cx="3291840" cy="4572000"/>
           </a:xfrm>
           <a:prstGeom prst="rect">
             <a:avLst/>
@@ -3475,31 +3492,618 @@
           <a:p>
             <a:pPr algn="ctr">
               <a:spcBef>
+                <a:spcPts val="1200"/>
+              </a:spcBef>
+              <a:defRPr sz="1300">
+                <a:solidFill>
+                  <a:srgbClr val="475569"/>
+                </a:solidFill>
+              </a:defRPr>
+            </a:pPr>
+            <a:r>
+              <a:t>Lånetak: ≤ 78,0% (TBU: ≤ 80,0%)</a:t>
+            </a:r>
+          </a:p>
+          <a:p>
+            <a:pPr algn="ctr">
+              <a:spcBef>
+                <a:spcPts val="1800"/>
+              </a:spcBef>
+              <a:defRPr sz="1200" b="1">
+                <a:solidFill>
+                  <a:srgbClr val="002855"/>
+                </a:solidFill>
+              </a:defRPr>
+            </a:pPr>
+            <a:r>
+              <a:t>Status: 🟢 Under vedtatt lånegrense</a:t>
+            </a:r>
+          </a:p>
+        </p:txBody>
+      </p:sp>
+    </p:spTree>
+  </p:cSld>
+  <p:clrMapOvr>
+    <a:masterClrMapping/>
+  </p:clrMapOvr>
+</p:sld>
+</file>
+
+<file path=ppt/slides/slide3.xml><?xml version="1.0" encoding="utf-8"?>
+<p:sld xmlns:a="http://schemas.openxmlformats.org/drawingml/2006/main" xmlns:p="http://schemas.openxmlformats.org/presentationml/2006/main" xmlns:r="http://schemas.openxmlformats.org/officeDocument/2006/relationships">
+  <p:cSld>
+    <p:spTree>
+      <p:nvGrpSpPr>
+        <p:cNvPr id="1" name=""/>
+        <p:cNvGrpSpPr/>
+        <p:nvPr/>
+      </p:nvGrpSpPr>
+      <p:grpSpPr/>
+      <p:sp>
+        <p:nvSpPr>
+          <p:cNvPr id="2" name="TextBox 1"/>
+          <p:cNvSpPr txBox="1"/>
+          <p:nvPr/>
+        </p:nvSpPr>
+        <p:spPr>
+          <a:xfrm>
+            <a:off x="731520" y="457200"/>
+            <a:ext cx="10698480" cy="914400"/>
+          </a:xfrm>
+          <a:prstGeom prst="rect">
+            <a:avLst/>
+          </a:prstGeom>
+          <a:noFill/>
+        </p:spPr>
+        <p:txBody>
+          <a:bodyPr wrap="none">
+            <a:spAutoFit/>
+          </a:bodyPr>
+          <a:lstStyle/>
+          <a:p>
+            <a:pPr>
+              <a:defRPr sz="2600" b="1">
+                <a:solidFill>
+                  <a:srgbClr val="002855"/>
+                </a:solidFill>
+              </a:defRPr>
+            </a:pPr>
+            <a:r>
+              <a:t>📊 Sektorvis Budsjettoppfølging &amp; Triage — M10 YTD</a:t>
+            </a:r>
+          </a:p>
+        </p:txBody>
+      </p:sp>
+      <p:sp>
+        <p:nvSpPr>
+          <p:cNvPr id="3" name="Rectangle 2"/>
+          <p:cNvSpPr/>
+          <p:nvPr/>
+        </p:nvSpPr>
+        <p:spPr>
+          <a:xfrm>
+            <a:off x="731520" y="1463040"/>
+            <a:ext cx="10698480" cy="1371600"/>
+          </a:xfrm>
+          <a:prstGeom prst="rect">
+            <a:avLst/>
+          </a:prstGeom>
+          <a:solidFill>
+            <a:srgbClr val="F1F5F9"/>
+          </a:solidFill>
+          <a:ln w="25400">
+            <a:solidFill>
+              <a:srgbClr val="DC2626"/>
+            </a:solidFill>
+          </a:ln>
+        </p:spPr>
+        <p:style>
+          <a:lnRef idx="1">
+            <a:schemeClr val="accent1"/>
+          </a:lnRef>
+          <a:fillRef idx="3">
+            <a:schemeClr val="accent1"/>
+          </a:fillRef>
+          <a:effectRef idx="2">
+            <a:schemeClr val="accent1"/>
+          </a:effectRef>
+          <a:fontRef idx="minor">
+            <a:schemeClr val="lt1"/>
+          </a:fontRef>
+        </p:style>
+        <p:txBody>
+          <a:bodyPr rtlCol="0" anchor="ctr" wrap="square"/>
+          <a:lstStyle/>
+          <a:p>
+            <a:pPr algn="ctr">
+              <a:defRPr sz="1500" b="1">
+                <a:solidFill>
+                  <a:srgbClr val="DC2626"/>
+                </a:solidFill>
+              </a:defRPr>
+            </a:pPr>
+            <a:r>
+              <a:t>Område Oppvekst &amp; Utdanning — Status: 🔴 RØD (Merforbruk vikar art 1020)</a:t>
+            </a:r>
+          </a:p>
+          <a:p>
+            <a:pPr>
+              <a:spcBef>
+                <a:spcPts val="600"/>
+              </a:spcBef>
+              <a:defRPr sz="1200">
+                <a:solidFill>
+                  <a:srgbClr val="0F172A"/>
+                </a:solidFill>
+              </a:defRPr>
+            </a:pPr>
+            <a:r>
+              <a:t>Periodisert ramme: 1 850 mill. kr  |  Bokført forbruk: 1 885 mill. kr  |  Netto avvik: -35,0 mill. kr (-1,89 %)</a:t>
+            </a:r>
+          </a:p>
+        </p:txBody>
+      </p:sp>
+      <p:sp>
+        <p:nvSpPr>
+          <p:cNvPr id="4" name="Rectangle 3"/>
+          <p:cNvSpPr/>
+          <p:nvPr/>
+        </p:nvSpPr>
+        <p:spPr>
+          <a:xfrm>
+            <a:off x="731520" y="3017520"/>
+            <a:ext cx="10698480" cy="1371600"/>
+          </a:xfrm>
+          <a:prstGeom prst="rect">
+            <a:avLst/>
+          </a:prstGeom>
+          <a:solidFill>
+            <a:srgbClr val="F1F5F9"/>
+          </a:solidFill>
+          <a:ln w="25400">
+            <a:solidFill>
+              <a:srgbClr val="DC2626"/>
+            </a:solidFill>
+          </a:ln>
+        </p:spPr>
+        <p:style>
+          <a:lnRef idx="1">
+            <a:schemeClr val="accent1"/>
+          </a:lnRef>
+          <a:fillRef idx="3">
+            <a:schemeClr val="accent1"/>
+          </a:fillRef>
+          <a:effectRef idx="2">
+            <a:schemeClr val="accent1"/>
+          </a:effectRef>
+          <a:fontRef idx="minor">
+            <a:schemeClr val="lt1"/>
+          </a:fontRef>
+        </p:style>
+        <p:txBody>
+          <a:bodyPr rtlCol="0" anchor="ctr" wrap="square"/>
+          <a:lstStyle/>
+          <a:p>
+            <a:pPr algn="ctr">
+              <a:defRPr sz="1500" b="1">
+                <a:solidFill>
+                  <a:srgbClr val="DC2626"/>
+                </a:solidFill>
+              </a:defRPr>
+            </a:pPr>
+            <a:r>
+              <a:t>Område Helse &amp; Mestring — Status: 🔴 RØD (Overtid art 1090 &amp; sykefravær)</a:t>
+            </a:r>
+          </a:p>
+          <a:p>
+            <a:pPr>
+              <a:spcBef>
+                <a:spcPts val="600"/>
+              </a:spcBef>
+              <a:defRPr sz="1200">
+                <a:solidFill>
+                  <a:srgbClr val="0F172A"/>
+                </a:solidFill>
+              </a:defRPr>
+            </a:pPr>
+            <a:r>
+              <a:t>Periodisert ramme: 2 100 mill. kr  |  Bokført forbruk: 2 142 mill. kr  |  Netto avvik: -42,0 mill. kr (-2,00 %)</a:t>
+            </a:r>
+          </a:p>
+        </p:txBody>
+      </p:sp>
+      <p:sp>
+        <p:nvSpPr>
+          <p:cNvPr id="5" name="Rectangle 4"/>
+          <p:cNvSpPr/>
+          <p:nvPr/>
+        </p:nvSpPr>
+        <p:spPr>
+          <a:xfrm>
+            <a:off x="731520" y="4572000"/>
+            <a:ext cx="10698480" cy="1371600"/>
+          </a:xfrm>
+          <a:prstGeom prst="rect">
+            <a:avLst/>
+          </a:prstGeom>
+          <a:solidFill>
+            <a:srgbClr val="F1F5F9"/>
+          </a:solidFill>
+          <a:ln w="25400">
+            <a:solidFill>
+              <a:srgbClr val="D97706"/>
+            </a:solidFill>
+          </a:ln>
+        </p:spPr>
+        <p:style>
+          <a:lnRef idx="1">
+            <a:schemeClr val="accent1"/>
+          </a:lnRef>
+          <a:fillRef idx="3">
+            <a:schemeClr val="accent1"/>
+          </a:fillRef>
+          <a:effectRef idx="2">
+            <a:schemeClr val="accent1"/>
+          </a:effectRef>
+          <a:fontRef idx="minor">
+            <a:schemeClr val="lt1"/>
+          </a:fontRef>
+        </p:style>
+        <p:txBody>
+          <a:bodyPr rtlCol="0" anchor="ctr" wrap="square"/>
+          <a:lstStyle/>
+          <a:p>
+            <a:pPr algn="ctr">
+              <a:defRPr sz="1500" b="1">
+                <a:solidFill>
+                  <a:srgbClr val="D97706"/>
+                </a:solidFill>
+              </a:defRPr>
+            </a:pPr>
+            <a:r>
+              <a:t>Område By- og Stedsutvikling (VAR Selvkost) — Status: 🟡 GUL (Snøbrøyting / Selvkost i balanse)</a:t>
+            </a:r>
+          </a:p>
+          <a:p>
+            <a:pPr>
+              <a:spcBef>
+                <a:spcPts val="600"/>
+              </a:spcBef>
+              <a:defRPr sz="1200">
+                <a:solidFill>
+                  <a:srgbClr val="0F172A"/>
+                </a:solidFill>
+              </a:defRPr>
+            </a:pPr>
+            <a:r>
+              <a:t>Periodisert ramme: 850 mill. kr  |  Bokført forbruk: 851,5 mill. kr  |  Netto avvik: -1,5 mill. kr (-0,18 %)</a:t>
+            </a:r>
+          </a:p>
+        </p:txBody>
+      </p:sp>
+    </p:spTree>
+  </p:cSld>
+  <p:clrMapOvr>
+    <a:masterClrMapping/>
+  </p:clrMapOvr>
+</p:sld>
+</file>
+
+<file path=ppt/slides/slide4.xml><?xml version="1.0" encoding="utf-8"?>
+<p:sld xmlns:a="http://schemas.openxmlformats.org/drawingml/2006/main" xmlns:p="http://schemas.openxmlformats.org/presentationml/2006/main" xmlns:r="http://schemas.openxmlformats.org/officeDocument/2006/relationships">
+  <p:cSld>
+    <p:spTree>
+      <p:nvGrpSpPr>
+        <p:cNvPr id="1" name=""/>
+        <p:cNvGrpSpPr/>
+        <p:nvPr/>
+      </p:nvGrpSpPr>
+      <p:grpSpPr/>
+      <p:sp>
+        <p:nvSpPr>
+          <p:cNvPr id="2" name="TextBox 1"/>
+          <p:cNvSpPr txBox="1"/>
+          <p:nvPr/>
+        </p:nvSpPr>
+        <p:spPr>
+          <a:xfrm>
+            <a:off x="731520" y="457200"/>
+            <a:ext cx="10698480" cy="914400"/>
+          </a:xfrm>
+          <a:prstGeom prst="rect">
+            <a:avLst/>
+          </a:prstGeom>
+          <a:noFill/>
+        </p:spPr>
+        <p:txBody>
+          <a:bodyPr wrap="none">
+            <a:spAutoFit/>
+          </a:bodyPr>
+          <a:lstStyle/>
+          <a:p>
+            <a:pPr>
+              <a:defRPr sz="2600" b="1">
+                <a:solidFill>
+                  <a:srgbClr val="002855"/>
+                </a:solidFill>
+              </a:defRPr>
+            </a:pPr>
+            <a:r>
+              <a:t>🛡️ Korrigerende Tiltak jf. § 14-5 &amp; Stage-Gate Port 9</a:t>
+            </a:r>
+          </a:p>
+        </p:txBody>
+      </p:sp>
+      <p:sp>
+        <p:nvSpPr>
+          <p:cNvPr id="3" name="Rectangle 2"/>
+          <p:cNvSpPr/>
+          <p:nvPr/>
+        </p:nvSpPr>
+        <p:spPr>
+          <a:xfrm>
+            <a:off x="731520" y="1463040"/>
+            <a:ext cx="6858000" cy="4572000"/>
+          </a:xfrm>
+          <a:prstGeom prst="rect">
+            <a:avLst/>
+          </a:prstGeom>
+          <a:solidFill>
+            <a:srgbClr val="F1F5F9"/>
+          </a:solidFill>
+          <a:ln w="19050">
+            <a:solidFill>
+              <a:srgbClr val="002855"/>
+            </a:solidFill>
+          </a:ln>
+        </p:spPr>
+        <p:style>
+          <a:lnRef idx="1">
+            <a:schemeClr val="accent1"/>
+          </a:lnRef>
+          <a:fillRef idx="3">
+            <a:schemeClr val="accent1"/>
+          </a:fillRef>
+          <a:effectRef idx="2">
+            <a:schemeClr val="accent1"/>
+          </a:effectRef>
+          <a:fontRef idx="minor">
+            <a:schemeClr val="lt1"/>
+          </a:fontRef>
+        </p:style>
+        <p:txBody>
+          <a:bodyPr rtlCol="0" anchor="ctr" wrap="square"/>
+          <a:lstStyle/>
+          <a:p>
+            <a:pPr algn="ctr">
+              <a:defRPr sz="1600" b="1">
+                <a:solidFill>
+                  <a:srgbClr val="002855"/>
+                </a:solidFill>
+              </a:defRPr>
+            </a:pPr>
+            <a:r>
+              <a:t>Korrigerende Handlingsplan (Kommuneloven § 14-5):</a:t>
+            </a:r>
+          </a:p>
+          <a:p>
+            <a:pPr>
+              <a:spcBef>
                 <a:spcPts val="1000"/>
               </a:spcBef>
-              <a:defRPr sz="1400">
-                <a:solidFill>
-                  <a:srgbClr val="475569"/>
+              <a:defRPr sz="1250">
+                <a:solidFill>
+                  <a:srgbClr val="0F172A"/>
                 </a:solidFill>
               </a:defRPr>
             </a:pPr>
             <a:r>
-              <a:t>Lånetak: ≤ 8,8 mrd. kr</a:t>
+              <a:t>1. Ansettelsesstopp på administrative stillinger ut året.</a:t>
+            </a:r>
+          </a:p>
+          <a:p>
+            <a:pPr>
+              <a:spcBef>
+                <a:spcPts val="1000"/>
+              </a:spcBef>
+              <a:defRPr sz="1250">
+                <a:solidFill>
+                  <a:srgbClr val="0F172A"/>
+                </a:solidFill>
+              </a:defRPr>
+            </a:pPr>
+            <a:r>
+              <a:t>2. Innstramming i vikarbruk (Art 1020) — godkjenning fra kommunalsjef kreves.</a:t>
+            </a:r>
+          </a:p>
+          <a:p>
+            <a:pPr>
+              <a:spcBef>
+                <a:spcPts val="1000"/>
+              </a:spcBef>
+              <a:defRPr sz="1250">
+                <a:solidFill>
+                  <a:srgbClr val="0F172A"/>
+                </a:solidFill>
+              </a:defRPr>
+            </a:pPr>
+            <a:r>
+              <a:t>3. Raskere innkreving av NAV-sykerefusjoner (Art 1600).</a:t>
+            </a:r>
+          </a:p>
+          <a:p>
+            <a:pPr>
+              <a:spcBef>
+                <a:spcPts val="1000"/>
+              </a:spcBef>
+              <a:defRPr sz="1250">
+                <a:solidFill>
+                  <a:srgbClr val="0F172A"/>
+                </a:solidFill>
+              </a:defRPr>
+            </a:pPr>
+            <a:r>
+              <a:t>4. Prosjektgjennomgang investeringsportefølje: Utsettelse av ikke-kritiske tiltak.</a:t>
+            </a:r>
+          </a:p>
+          <a:p>
+            <a:pPr>
+              <a:spcBef>
+                <a:spcPts val="1000"/>
+              </a:spcBef>
+              <a:defRPr sz="1250">
+                <a:solidFill>
+                  <a:srgbClr val="0F172A"/>
+                </a:solidFill>
+              </a:defRPr>
+            </a:pPr>
+            <a:r>
+              <a:t>5. Månedlig rapportering til Formannskapet frem mot årsoppgjøret.</a:t>
+            </a:r>
+          </a:p>
+        </p:txBody>
+      </p:sp>
+      <p:sp>
+        <p:nvSpPr>
+          <p:cNvPr id="4" name="Rectangle 3"/>
+          <p:cNvSpPr/>
+          <p:nvPr/>
+        </p:nvSpPr>
+        <p:spPr>
+          <a:xfrm>
+            <a:off x="7863840" y="1463040"/>
+            <a:ext cx="3566160" cy="4572000"/>
+          </a:xfrm>
+          <a:prstGeom prst="rect">
+            <a:avLst/>
+          </a:prstGeom>
+          <a:solidFill>
+            <a:srgbClr val="EEF2FF"/>
+          </a:solidFill>
+          <a:ln w="25400">
+            <a:solidFill>
+              <a:srgbClr val="0072CE"/>
+            </a:solidFill>
+          </a:ln>
+        </p:spPr>
+        <p:style>
+          <a:lnRef idx="1">
+            <a:schemeClr val="accent1"/>
+          </a:lnRef>
+          <a:fillRef idx="3">
+            <a:schemeClr val="accent1"/>
+          </a:fillRef>
+          <a:effectRef idx="2">
+            <a:schemeClr val="accent1"/>
+          </a:effectRef>
+          <a:fontRef idx="minor">
+            <a:schemeClr val="lt1"/>
+          </a:fontRef>
+        </p:style>
+        <p:txBody>
+          <a:bodyPr rtlCol="0" anchor="ctr" wrap="square"/>
+          <a:lstStyle/>
+          <a:p>
+            <a:pPr algn="ctr">
+              <a:defRPr sz="1600" b="1">
+                <a:solidFill>
+                  <a:srgbClr val="002855"/>
+                </a:solidFill>
+              </a:defRPr>
+            </a:pPr>
+            <a:r>
+              <a:t>Revisorattest &amp; Port 9</a:t>
             </a:r>
           </a:p>
           <a:p>
             <a:pPr algn="ctr">
               <a:spcBef>
-                <a:spcPts val="1500"/>
+                <a:spcPts val="1400"/>
               </a:spcBef>
-              <a:defRPr sz="1200">
-                <a:solidFill>
-                  <a:srgbClr val="002855"/>
+              <a:defRPr sz="1400" b="1">
+                <a:solidFill>
+                  <a:srgbClr val="10B981"/>
                 </a:solidFill>
               </a:defRPr>
             </a:pPr>
             <a:r>
-              <a:t>Status: Under gjeldsgrense</a:t>
+              <a:t>STATUS: GODKJENT</a:t>
+            </a:r>
+          </a:p>
+          <a:p>
+            <a:pPr algn="ctr">
+              <a:spcBef>
+                <a:spcPts val="1200"/>
+              </a:spcBef>
+              <a:defRPr sz="1050">
+                <a:solidFill>
+                  <a:srgbClr val="0F172A"/>
+                </a:solidFill>
+              </a:defRPr>
+            </a:pPr>
+            <a:r>
+              <a:t>Ansvarlig Controller:</a:t>
+            </a:r>
+            <a:br/>
+            <a:r>
+              <a:t>Frank Ellingsen, Senior Financial Controller</a:t>
+            </a:r>
+          </a:p>
+          <a:p>
+            <a:pPr algn="ctr">
+              <a:spcBef>
+                <a:spcPts val="1200"/>
+              </a:spcBef>
+              <a:defRPr sz="1050">
+                <a:solidFill>
+                  <a:srgbClr val="0F172A"/>
+                </a:solidFill>
+              </a:defRPr>
+            </a:pPr>
+            <a:r>
+              <a:t>Kontrollorgan:</a:t>
+            </a:r>
+            <a:br/>
+            <a:r>
+              <a:t>Telemark Revisjon IKS</a:t>
+            </a:r>
+          </a:p>
+          <a:p>
+            <a:pPr algn="ctr">
+              <a:spcBef>
+                <a:spcPts val="1200"/>
+              </a:spcBef>
+              <a:defRPr sz="1050">
+                <a:solidFill>
+                  <a:srgbClr val="0F172A"/>
+                </a:solidFill>
+              </a:defRPr>
+            </a:pPr>
+            <a:r>
+              <a:t>Attestdato:</a:t>
+            </a:r>
+            <a:br/>
+            <a:r>
+              <a:t>2026-10-18</a:t>
+            </a:r>
+          </a:p>
+          <a:p>
+            <a:pPr algn="ctr">
+              <a:spcBef>
+                <a:spcPts val="1200"/>
+              </a:spcBef>
+              <a:defRPr sz="1050">
+                <a:solidFill>
+                  <a:srgbClr val="0F172A"/>
+                </a:solidFill>
+              </a:defRPr>
+            </a:pPr>
+            <a:r>
+              <a:t>SHA-256 Forsegling:</a:t>
+            </a:r>
+            <a:br/>
+            <a:r>
+              <a:t>06b3a22a57b291904334...</a:t>
             </a:r>
           </a:p>
         </p:txBody>
